--- a/assessments/HS-LS1-1/slides/Day_6_Case_data.pptx
+++ b/assessments/HS-LS1-1/slides/Day_6_Case_data.pptx
@@ -3205,7 +3205,7 @@
               </a:defRPr>
             </a:pPr>
             <a:r>
-              <a:t>• Today's target: use case data to explain how a DNA change affects the body (LS1-1.6)</a:t>
+              <a:t>• Today's target: use case data to explain how a DNA change affects the body (LS1-1.5)</a:t>
             </a:r>
           </a:p>
         </p:txBody>
@@ -4899,7 +4899,7 @@
               </a:defRPr>
             </a:pPr>
             <a:r>
-              <a:t>Exit ticket: CFA LS1-1.6</a:t>
+              <a:t>Exit ticket: CFA LS1-1.5</a:t>
             </a:r>
           </a:p>
         </p:txBody>
